--- a/112111136張紘齊.pptx
+++ b/112111136張紘齊.pptx
@@ -15,7 +15,6 @@
     <p:sldId id="263" r:id="rId9"/>
     <p:sldId id="264" r:id="rId10"/>
     <p:sldId id="265" r:id="rId11"/>
-    <p:sldId id="266" r:id="rId12"/>
   </p:sldIdLst>
   <p:sldSz cx="12192000" cy="6858000"/>
   <p:notesSz cx="6858000" cy="9144000"/>
@@ -114,6 +113,11 @@
       </a:defRPr>
     </a:lvl9pPr>
   </p:defaultTextStyle>
+  <p:extLst>
+    <p:ext uri="{EFAFB233-063F-42B5-8137-9DF3F51BA10A}">
+      <p15:sldGuideLst xmlns:p15="http://schemas.microsoft.com/office/powerpoint/2012/main"/>
+    </p:ext>
+  </p:extLst>
 </p:presentation>
 </file>
 
@@ -4032,12 +4036,16 @@
           <a:p>
             <a:pPr algn="ctr"/>
             <a:r>
-              <a:rPr lang="zh-TW" altLang="en-US" sz="6000" dirty="0">
+              <a:rPr lang="en-US" altLang="zh-TW" sz="6000">
                 <a:latin typeface="微軟正黑體" panose="020B0604030504040204" pitchFamily="34" charset="-120"/>
                 <a:ea typeface="微軟正黑體" panose="020B0604030504040204" pitchFamily="34" charset="-120"/>
               </a:rPr>
-              <a:t>謝謝大家</a:t>
-            </a:r>
+              <a:t>Git hub</a:t>
+            </a:r>
+            <a:endParaRPr lang="zh-TW" altLang="en-US" sz="6000" dirty="0">
+              <a:latin typeface="微軟正黑體" panose="020B0604030504040204" pitchFamily="34" charset="-120"/>
+              <a:ea typeface="微軟正黑體" panose="020B0604030504040204" pitchFamily="34" charset="-120"/>
+            </a:endParaRPr>
           </a:p>
         </p:txBody>
       </p:sp>
@@ -4045,180 +4053,6 @@
     <p:extLst>
       <p:ext uri="{BB962C8B-B14F-4D97-AF65-F5344CB8AC3E}">
         <p14:creationId xmlns:p14="http://schemas.microsoft.com/office/powerpoint/2010/main" val="1231153039"/>
-      </p:ext>
-    </p:extLst>
-  </p:cSld>
-  <p:clrMapOvr>
-    <a:masterClrMapping/>
-  </p:clrMapOvr>
-</p:sld>
-</file>
-
-<file path=ppt/slides/slide11.xml><?xml version="1.0" encoding="utf-8"?>
-<p:sld xmlns:a="http://schemas.openxmlformats.org/drawingml/2006/main" xmlns:r="http://schemas.openxmlformats.org/officeDocument/2006/relationships" xmlns:p="http://schemas.openxmlformats.org/presentationml/2006/main">
-  <p:cSld>
-    <p:spTree>
-      <p:nvGrpSpPr>
-        <p:cNvPr id="1" name=""/>
-        <p:cNvGrpSpPr/>
-        <p:nvPr/>
-      </p:nvGrpSpPr>
-      <p:grpSpPr>
-        <a:xfrm>
-          <a:off x="0" y="0"/>
-          <a:ext cx="0" cy="0"/>
-          <a:chOff x="0" y="0"/>
-          <a:chExt cx="0" cy="0"/>
-        </a:xfrm>
-      </p:grpSpPr>
-      <p:sp>
-        <p:nvSpPr>
-          <p:cNvPr id="2" name="標題 1">
-            <a:extLst>
-              <a:ext uri="{FF2B5EF4-FFF2-40B4-BE49-F238E27FC236}">
-                <a16:creationId xmlns:a16="http://schemas.microsoft.com/office/drawing/2014/main" id="{BEF6255A-5B78-309B-9DAB-12DD66AD81E5}"/>
-              </a:ext>
-            </a:extLst>
-          </p:cNvPr>
-          <p:cNvSpPr>
-            <a:spLocks noGrp="1"/>
-          </p:cNvSpPr>
-          <p:nvPr>
-            <p:ph type="title"/>
-          </p:nvPr>
-        </p:nvSpPr>
-        <p:spPr/>
-        <p:txBody>
-          <a:bodyPr/>
-          <a:lstStyle/>
-          <a:p>
-            <a:pPr algn="ctr"/>
-            <a:r>
-              <a:rPr lang="zh-TW" altLang="en-US" dirty="0"/>
-              <a:t>參考文獻</a:t>
-            </a:r>
-          </a:p>
-        </p:txBody>
-      </p:sp>
-      <p:sp>
-        <p:nvSpPr>
-          <p:cNvPr id="3" name="內容版面配置區 2">
-            <a:extLst>
-              <a:ext uri="{FF2B5EF4-FFF2-40B4-BE49-F238E27FC236}">
-                <a16:creationId xmlns:a16="http://schemas.microsoft.com/office/drawing/2014/main" id="{09938AEA-5323-3481-CECA-AB6FEEF91723}"/>
-              </a:ext>
-            </a:extLst>
-          </p:cNvPr>
-          <p:cNvSpPr>
-            <a:spLocks noGrp="1"/>
-          </p:cNvSpPr>
-          <p:nvPr>
-            <p:ph idx="1"/>
-          </p:nvPr>
-        </p:nvSpPr>
-        <p:spPr/>
-        <p:txBody>
-          <a:bodyPr/>
-          <a:lstStyle/>
-          <a:p>
-            <a:pPr lvl="0"/>
-            <a:r>
-              <a:rPr lang="zh-TW" altLang="zh-TW" dirty="0"/>
-              <a:t>衛生福利部國民健康署</a:t>
-            </a:r>
-            <a:r>
-              <a:rPr lang="en-US" altLang="zh-TW" dirty="0"/>
-              <a:t>, "</a:t>
-            </a:r>
-            <a:r>
-              <a:rPr lang="zh-TW" altLang="zh-TW" dirty="0"/>
-              <a:t>中老年身心社會生活狀況長期追蹤調查</a:t>
-            </a:r>
-            <a:r>
-              <a:rPr lang="en-US" altLang="zh-TW" dirty="0"/>
-              <a:t>," 2024. [</a:t>
-            </a:r>
-            <a:r>
-              <a:rPr lang="zh-TW" altLang="zh-TW" dirty="0"/>
-              <a:t>線上資料</a:t>
-            </a:r>
-            <a:r>
-              <a:rPr lang="en-US" altLang="zh-TW" dirty="0"/>
-              <a:t>]: </a:t>
-            </a:r>
-            <a:r>
-              <a:rPr lang="en-US" altLang="zh-TW" u="sng" dirty="0">
-                <a:hlinkClick r:id="rId2"/>
-              </a:rPr>
-              <a:t>https://www.hpa.gov.tw/Pages/List.aspx?nodeid=108</a:t>
-            </a:r>
-            <a:r>
-              <a:rPr lang="en-US" altLang="zh-TW" dirty="0"/>
-              <a:t> </a:t>
-            </a:r>
-            <a:endParaRPr lang="zh-TW" altLang="zh-TW" dirty="0"/>
-          </a:p>
-          <a:p>
-            <a:pPr lvl="0"/>
-            <a:r>
-              <a:rPr lang="en-US" altLang="zh-TW" u="sng" dirty="0" err="1">
-                <a:hlinkClick r:id="rId3"/>
-              </a:rPr>
-              <a:t>衛生福利部國民健康署</a:t>
-            </a:r>
-            <a:r>
-              <a:rPr lang="en-US" altLang="zh-TW" u="sng" dirty="0">
-                <a:hlinkClick r:id="rId3"/>
-              </a:rPr>
-              <a:t>, "</a:t>
-            </a:r>
-            <a:r>
-              <a:rPr lang="en-US" altLang="zh-TW" u="sng" dirty="0" err="1">
-                <a:hlinkClick r:id="rId3"/>
-              </a:rPr>
-              <a:t>民國一百一十二年中老年身心社會生活狀況長期追蹤調查成果報告</a:t>
-            </a:r>
-            <a:r>
-              <a:rPr lang="en-US" altLang="zh-TW" u="sng" dirty="0">
-                <a:hlinkClick r:id="rId3"/>
-              </a:rPr>
-              <a:t>," </a:t>
-            </a:r>
-            <a:r>
-              <a:rPr lang="en-US" altLang="zh-TW" u="sng" dirty="0" err="1">
-                <a:hlinkClick r:id="rId3"/>
-              </a:rPr>
-              <a:t>台北</a:t>
-            </a:r>
-            <a:r>
-              <a:rPr lang="en-US" altLang="zh-TW" u="sng" dirty="0">
-                <a:hlinkClick r:id="rId3"/>
-              </a:rPr>
-              <a:t>: </a:t>
-            </a:r>
-            <a:r>
-              <a:rPr lang="en-US" altLang="zh-TW" u="sng" dirty="0" err="1">
-                <a:hlinkClick r:id="rId3"/>
-              </a:rPr>
-              <a:t>衛生福利部國民健康署</a:t>
-            </a:r>
-            <a:r>
-              <a:rPr lang="en-US" altLang="zh-TW" u="sng" dirty="0">
-                <a:hlinkClick r:id="rId3"/>
-              </a:rPr>
-              <a:t>, 2025.</a:t>
-            </a:r>
-            <a:endParaRPr lang="zh-TW" altLang="zh-TW" dirty="0"/>
-          </a:p>
-          <a:p>
-            <a:endParaRPr lang="zh-TW" altLang="en-US" dirty="0"/>
-          </a:p>
-        </p:txBody>
-      </p:sp>
-    </p:spTree>
-    <p:extLst>
-      <p:ext uri="{BB962C8B-B14F-4D97-AF65-F5344CB8AC3E}">
-        <p14:creationId xmlns:p14="http://schemas.microsoft.com/office/powerpoint/2010/main" val="162545064"/>
       </p:ext>
     </p:extLst>
   </p:cSld>

--- a/112111136張紘齊.pptx
+++ b/112111136張紘齊.pptx
@@ -4049,6 +4049,36 @@
           </a:p>
         </p:txBody>
       </p:sp>
+      <p:pic>
+        <p:nvPicPr>
+          <p:cNvPr id="4" name="圖片 3">
+            <a:extLst>
+              <a:ext uri="{FF2B5EF4-FFF2-40B4-BE49-F238E27FC236}">
+                <a16:creationId xmlns:a16="http://schemas.microsoft.com/office/drawing/2014/main" id="{DAAD81E6-C497-D409-EC89-A82CBA21C40C}"/>
+              </a:ext>
+            </a:extLst>
+          </p:cNvPr>
+          <p:cNvPicPr>
+            <a:picLocks noChangeAspect="1"/>
+          </p:cNvPicPr>
+          <p:nvPr/>
+        </p:nvPicPr>
+        <p:blipFill>
+          <a:blip r:embed="rId2"/>
+          <a:stretch>
+            <a:fillRect/>
+          </a:stretch>
+        </p:blipFill>
+        <p:spPr>
+          <a:xfrm>
+            <a:off x="982166" y="2292627"/>
+            <a:ext cx="10227668" cy="3472070"/>
+          </a:xfrm>
+          <a:prstGeom prst="rect">
+            <a:avLst/>
+          </a:prstGeom>
+        </p:spPr>
+      </p:pic>
     </p:spTree>
     <p:extLst>
       <p:ext uri="{BB962C8B-B14F-4D97-AF65-F5344CB8AC3E}">
